--- a/tests/tmp/merge_no_dup.pptx
+++ b/tests/tmp/merge_no_dup.pptx
@@ -2,7 +2,7 @@
 <file path=ppt/presentation.xml><?xml version="1.0" encoding="utf-8"?>
 <p:presentation xmlns:a="http://schemas.openxmlformats.org/drawingml/2006/main" xmlns:r="http://schemas.openxmlformats.org/officeDocument/2006/relationships" xmlns:p="http://schemas.openxmlformats.org/presentationml/2006/main" saveSubsetFonts="1">
   <p:sldMasterIdLst>
-    <p:sldMasterId id="2147483773" r:id="rId1"/>
+    <p:sldMasterId id="2147483782" r:id="rId1"/>
   </p:sldMasterIdLst>
   <p:notesMasterIdLst>
     <p:notesMasterId r:id="rId3"/>
@@ -162,6 +162,14 @@
 </p:presentation>
 </file>
 
+<file path=ppt/revisionInfo.xml><?xml version="1.0" encoding="utf-8"?>
+<p1510:revInfo xmlns:a="http://schemas.openxmlformats.org/drawingml/2006/main" xmlns:r="http://schemas.openxmlformats.org/officeDocument/2006/relationships" xmlns:p1510="http://schemas.microsoft.com/office/powerpoint/2015/10/main">
+  <p1510:revLst>
+    <p1510:client id="{7F34682A-0780-4E8B-8D98-0D280E4D050C}" v="154" dt="2025-03-19T10:51:42.850"/>
+  </p1510:revLst>
+</p1510:revInfo>
+</file>
+
 <file path=ppt/notesMasters/notesMaster1.xml><?xml version="1.0" encoding="utf-8"?>
 <p:notesMaster xmlns:a="http://schemas.openxmlformats.org/drawingml/2006/main" xmlns:r="http://schemas.openxmlformats.org/officeDocument/2006/relationships" xmlns:p="http://schemas.openxmlformats.org/presentationml/2006/main">
   <p:cSld>
@@ -3226,17 +3234,17 @@
   </p:cSld>
   <p:clrMap bg1="lt1" tx1="dk1" bg2="lt2" tx2="dk2" accent1="accent1" accent2="accent2" accent3="accent3" accent4="accent4" accent5="accent5" accent6="accent6" hlink="hlink" folHlink="folHlink"/>
   <p:sldLayoutIdLst>
-    <p:sldLayoutId id="2147483761" r:id="rId1"/>
-    <p:sldLayoutId id="2147483762" r:id="rId2"/>
-    <p:sldLayoutId id="2147483763" r:id="rId3"/>
-    <p:sldLayoutId id="2147483764" r:id="rId4"/>
-    <p:sldLayoutId id="2147483765" r:id="rId5"/>
-    <p:sldLayoutId id="2147483766" r:id="rId6"/>
-    <p:sldLayoutId id="2147483767" r:id="rId7"/>
-    <p:sldLayoutId id="2147483768" r:id="rId8"/>
-    <p:sldLayoutId id="2147483769" r:id="rId9"/>
-    <p:sldLayoutId id="2147483770" r:id="rId10"/>
-    <p:sldLayoutId id="2147483771" r:id="rId11"/>
+    <p:sldLayoutId id="2147483770" r:id="rId1"/>
+    <p:sldLayoutId id="2147483771" r:id="rId2"/>
+    <p:sldLayoutId id="2147483772" r:id="rId3"/>
+    <p:sldLayoutId id="2147483773" r:id="rId4"/>
+    <p:sldLayoutId id="2147483774" r:id="rId5"/>
+    <p:sldLayoutId id="2147483775" r:id="rId6"/>
+    <p:sldLayoutId id="2147483776" r:id="rId7"/>
+    <p:sldLayoutId id="2147483777" r:id="rId8"/>
+    <p:sldLayoutId id="2147483778" r:id="rId9"/>
+    <p:sldLayoutId id="2147483779" r:id="rId10"/>
+    <p:sldLayoutId id="2147483780" r:id="rId11"/>
   </p:sldLayoutIdLst>
   <p:txStyles>
     <p:titleStyle>

--- a/tests/tmp/merge_no_dup.pptx
+++ b/tests/tmp/merge_no_dup.pptx
@@ -2,14 +2,14 @@
 <file path=ppt/presentation.xml><?xml version="1.0" encoding="utf-8"?>
 <p:presentation xmlns:a="http://schemas.openxmlformats.org/drawingml/2006/main" xmlns:r="http://schemas.openxmlformats.org/officeDocument/2006/relationships" xmlns:p="http://schemas.openxmlformats.org/presentationml/2006/main" saveSubsetFonts="1">
   <p:sldMasterIdLst>
-    <p:sldMasterId id="2147483782" r:id="rId1"/>
+    <p:sldMasterId id="2147483900" r:id="rId1"/>
   </p:sldMasterIdLst>
   <p:notesMasterIdLst>
-    <p:notesMasterId r:id="rId3"/>
+    <p:notesMasterId r:id="rId5"/>
   </p:notesMasterIdLst>
   <p:sldIdLst>
     <p:sldId id="256" r:id="rId2"/>
-    <p:sldId id="257" r:id="rId9"/>
+    <p:sldId id="257" r:id="rId3"/>
   </p:sldIdLst>
   <p:sldSz cx="10691813" cy="7559675"/>
   <p:notesSz cx="6858000" cy="9144000"/>
@@ -3234,17 +3234,17 @@
   </p:cSld>
   <p:clrMap bg1="lt1" tx1="dk1" bg2="lt2" tx2="dk2" accent1="accent1" accent2="accent2" accent3="accent3" accent4="accent4" accent5="accent5" accent6="accent6" hlink="hlink" folHlink="folHlink"/>
   <p:sldLayoutIdLst>
-    <p:sldLayoutId id="2147483770" r:id="rId1"/>
-    <p:sldLayoutId id="2147483771" r:id="rId2"/>
-    <p:sldLayoutId id="2147483772" r:id="rId3"/>
-    <p:sldLayoutId id="2147483773" r:id="rId4"/>
-    <p:sldLayoutId id="2147483774" r:id="rId5"/>
-    <p:sldLayoutId id="2147483775" r:id="rId6"/>
-    <p:sldLayoutId id="2147483776" r:id="rId7"/>
-    <p:sldLayoutId id="2147483777" r:id="rId8"/>
-    <p:sldLayoutId id="2147483778" r:id="rId9"/>
-    <p:sldLayoutId id="2147483779" r:id="rId10"/>
-    <p:sldLayoutId id="2147483780" r:id="rId11"/>
+    <p:sldLayoutId id="2147483887" r:id="rId1"/>
+    <p:sldLayoutId id="2147483888" r:id="rId2"/>
+    <p:sldLayoutId id="2147483889" r:id="rId3"/>
+    <p:sldLayoutId id="2147483890" r:id="rId4"/>
+    <p:sldLayoutId id="2147483891" r:id="rId5"/>
+    <p:sldLayoutId id="2147483892" r:id="rId6"/>
+    <p:sldLayoutId id="2147483893" r:id="rId7"/>
+    <p:sldLayoutId id="2147483894" r:id="rId8"/>
+    <p:sldLayoutId id="2147483895" r:id="rId9"/>
+    <p:sldLayoutId id="2147483896" r:id="rId10"/>
+    <p:sldLayoutId id="2147483897" r:id="rId11"/>
   </p:sldLayoutIdLst>
   <p:txStyles>
     <p:titleStyle>

--- a/tests/tmp/merge_no_dup.pptx
+++ b/tests/tmp/merge_no_dup.pptx
@@ -2,7 +2,7 @@
 <file path=ppt/presentation.xml><?xml version="1.0" encoding="utf-8"?>
 <p:presentation xmlns:a="http://schemas.openxmlformats.org/drawingml/2006/main" xmlns:r="http://schemas.openxmlformats.org/officeDocument/2006/relationships" xmlns:p="http://schemas.openxmlformats.org/presentationml/2006/main" saveSubsetFonts="1">
   <p:sldMasterIdLst>
-    <p:sldMasterId id="2147483900" r:id="rId1"/>
+    <p:sldMasterId id="2147483984" r:id="rId1"/>
   </p:sldMasterIdLst>
   <p:notesMasterIdLst>
     <p:notesMasterId r:id="rId5"/>
@@ -3234,17 +3234,17 @@
   </p:cSld>
   <p:clrMap bg1="lt1" tx1="dk1" bg2="lt2" tx2="dk2" accent1="accent1" accent2="accent2" accent3="accent3" accent4="accent4" accent5="accent5" accent6="accent6" hlink="hlink" folHlink="folHlink"/>
   <p:sldLayoutIdLst>
-    <p:sldLayoutId id="2147483887" r:id="rId1"/>
-    <p:sldLayoutId id="2147483888" r:id="rId2"/>
-    <p:sldLayoutId id="2147483889" r:id="rId3"/>
-    <p:sldLayoutId id="2147483890" r:id="rId4"/>
-    <p:sldLayoutId id="2147483891" r:id="rId5"/>
-    <p:sldLayoutId id="2147483892" r:id="rId6"/>
-    <p:sldLayoutId id="2147483893" r:id="rId7"/>
-    <p:sldLayoutId id="2147483894" r:id="rId8"/>
-    <p:sldLayoutId id="2147483895" r:id="rId9"/>
-    <p:sldLayoutId id="2147483896" r:id="rId10"/>
-    <p:sldLayoutId id="2147483897" r:id="rId11"/>
+    <p:sldLayoutId id="2147483737" r:id="rId1"/>
+    <p:sldLayoutId id="2147483738" r:id="rId2"/>
+    <p:sldLayoutId id="2147483739" r:id="rId3"/>
+    <p:sldLayoutId id="2147483740" r:id="rId4"/>
+    <p:sldLayoutId id="2147483741" r:id="rId5"/>
+    <p:sldLayoutId id="2147483742" r:id="rId6"/>
+    <p:sldLayoutId id="2147483743" r:id="rId7"/>
+    <p:sldLayoutId id="2147483744" r:id="rId8"/>
+    <p:sldLayoutId id="2147483745" r:id="rId9"/>
+    <p:sldLayoutId id="2147483746" r:id="rId10"/>
+    <p:sldLayoutId id="2147483747" r:id="rId11"/>
   </p:sldLayoutIdLst>
   <p:txStyles>
     <p:titleStyle>

--- a/tests/tmp/merge_no_dup.pptx
+++ b/tests/tmp/merge_no_dup.pptx
@@ -2,7 +2,7 @@
 <file path=ppt/presentation.xml><?xml version="1.0" encoding="utf-8"?>
 <p:presentation xmlns:a="http://schemas.openxmlformats.org/drawingml/2006/main" xmlns:r="http://schemas.openxmlformats.org/officeDocument/2006/relationships" xmlns:p="http://schemas.openxmlformats.org/presentationml/2006/main" saveSubsetFonts="1">
   <p:sldMasterIdLst>
-    <p:sldMasterId id="2147483984" r:id="rId1"/>
+    <p:sldMasterId id="2147483845" r:id="rId1"/>
   </p:sldMasterIdLst>
   <p:notesMasterIdLst>
     <p:notesMasterId r:id="rId5"/>

--- a/tests/tmp/merge_no_dup.pptx
+++ b/tests/tmp/merge_no_dup.pptx
@@ -2,7 +2,7 @@
 <file path=ppt/presentation.xml><?xml version="1.0" encoding="utf-8"?>
 <p:presentation xmlns:a="http://schemas.openxmlformats.org/drawingml/2006/main" xmlns:r="http://schemas.openxmlformats.org/officeDocument/2006/relationships" xmlns:p="http://schemas.openxmlformats.org/presentationml/2006/main" saveSubsetFonts="1">
   <p:sldMasterIdLst>
-    <p:sldMasterId id="2147483845" r:id="rId1"/>
+    <p:sldMasterId id="2147483908" r:id="rId1"/>
   </p:sldMasterIdLst>
   <p:notesMasterIdLst>
     <p:notesMasterId r:id="rId5"/>

--- a/tests/tmp/merge_no_dup.pptx
+++ b/tests/tmp/merge_no_dup.pptx
@@ -2,7 +2,7 @@
 <file path=ppt/presentation.xml><?xml version="1.0" encoding="utf-8"?>
 <p:presentation xmlns:a="http://schemas.openxmlformats.org/drawingml/2006/main" xmlns:r="http://schemas.openxmlformats.org/officeDocument/2006/relationships" xmlns:p="http://schemas.openxmlformats.org/presentationml/2006/main" saveSubsetFonts="1">
   <p:sldMasterIdLst>
-    <p:sldMasterId id="2147483908" r:id="rId1"/>
+    <p:sldMasterId id="2147483884" r:id="rId1"/>
   </p:sldMasterIdLst>
   <p:notesMasterIdLst>
     <p:notesMasterId r:id="rId5"/>

--- a/tests/tmp/merge_no_dup.pptx
+++ b/tests/tmp/merge_no_dup.pptx
@@ -2,7 +2,7 @@
 <file path=ppt/presentation.xml><?xml version="1.0" encoding="utf-8"?>
 <p:presentation xmlns:a="http://schemas.openxmlformats.org/drawingml/2006/main" xmlns:r="http://schemas.openxmlformats.org/officeDocument/2006/relationships" xmlns:p="http://schemas.openxmlformats.org/presentationml/2006/main" saveSubsetFonts="1">
   <p:sldMasterIdLst>
-    <p:sldMasterId id="2147483884" r:id="rId1"/>
+    <p:sldMasterId id="2147483893" r:id="rId1"/>
   </p:sldMasterIdLst>
   <p:notesMasterIdLst>
     <p:notesMasterId r:id="rId5"/>

--- a/tests/tmp/merge_no_dup.pptx
+++ b/tests/tmp/merge_no_dup.pptx
@@ -2,7 +2,7 @@
 <file path=ppt/presentation.xml><?xml version="1.0" encoding="utf-8"?>
 <p:presentation xmlns:a="http://schemas.openxmlformats.org/drawingml/2006/main" xmlns:r="http://schemas.openxmlformats.org/officeDocument/2006/relationships" xmlns:p="http://schemas.openxmlformats.org/presentationml/2006/main" saveSubsetFonts="1">
   <p:sldMasterIdLst>
-    <p:sldMasterId id="2147483893" r:id="rId1"/>
+    <p:sldMasterId id="2147484686" r:id="rId1"/>
   </p:sldMasterIdLst>
   <p:notesMasterIdLst>
     <p:notesMasterId r:id="rId5"/>

--- a/tests/tmp/merge_no_dup.pptx
+++ b/tests/tmp/merge_no_dup.pptx
@@ -2,7 +2,7 @@
 <file path=ppt/presentation.xml><?xml version="1.0" encoding="utf-8"?>
 <p:presentation xmlns:a="http://schemas.openxmlformats.org/drawingml/2006/main" xmlns:r="http://schemas.openxmlformats.org/officeDocument/2006/relationships" xmlns:p="http://schemas.openxmlformats.org/presentationml/2006/main" saveSubsetFonts="1">
   <p:sldMasterIdLst>
-    <p:sldMasterId id="2147484686" r:id="rId1"/>
+    <p:sldMasterId id="2147485517" r:id="rId1"/>
   </p:sldMasterIdLst>
   <p:notesMasterIdLst>
     <p:notesMasterId r:id="rId5"/>
